--- a/output/documents/ACR_Cardiac_Imaging_Presentation.pptx
+++ b/output/documents/ACR_Cardiac_Imaging_Presentation.pptx
@@ -3276,7 +3276,7 @@
               </a:defRPr>
             </a:pPr>
             <a:r>
-              <a:t>ACR accreditation is REQUIRED for Medicare reimbursement (Deficit Reduction Act 2005)</a:t>
+              <a:t>ACR accreditation is REQUIRED for Medicare reimbursement (DRA 2005)</a:t>
             </a:r>
           </a:p>
           <a:p>
@@ -3540,7 +3540,7 @@
               </a:defRPr>
             </a:pPr>
             <a:r>
-              <a:t>  - IRR per 10-percentile increase in vulnerability</a:t>
+              <a:t>  - IRR reported per 10-percentile increase in vulnerability/deprivation</a:t>
             </a:r>
           </a:p>
           <a:p>
@@ -3555,7 +3555,7 @@
               </a:defRPr>
             </a:pPr>
             <a:r>
-              <a:t>Exclusion: 106 counties with &lt;1,000 adults 45+ (prevents unstable rates)</a:t>
+              <a:t>Exclusion: 106 counties with &lt;1,000 adults 45+ (unstable rates)</a:t>
             </a:r>
           </a:p>
           <a:p>
@@ -3669,7 +3669,7 @@
               </a:defRPr>
             </a:pPr>
             <a:r>
-              <a:t>725 CMR facilities in 299 counties (9.5% of US counties)</a:t>
+              <a:t>687 CMR facilities in 289 counties (9.2% of US counties)</a:t>
             </a:r>
           </a:p>
           <a:p>
@@ -3684,7 +3684,7 @@
               </a:defRPr>
             </a:pPr>
             <a:r>
-              <a:t>1,548 CCT facilities in 553 counties (17.6% of US counties)</a:t>
+              <a:t>1,481 CCT facilities in 532 counties (16.9% of US counties)</a:t>
             </a:r>
           </a:p>
           <a:p>
@@ -3699,7 +3699,7 @@
               </a:defRPr>
             </a:pPr>
             <a:r>
-              <a:t>90.5% of counties have ZERO CMR sites; 82.4% have ZERO CCT sites</a:t>
+              <a:t>90.8% of counties have ZERO CMR sites; 83.1% have ZERO CCT sites</a:t>
             </a:r>
           </a:p>
           <a:p>
@@ -3714,7 +3714,7 @@
               </a:defRPr>
             </a:pPr>
             <a:r>
-              <a:t>Metropolitan counties (37.3% of all counties) contain:</a:t>
+              <a:t>Metropolitan counties (37.7% of all counties) contain:</a:t>
             </a:r>
           </a:p>
           <a:p>
@@ -3972,7 +3972,7 @@
               </a:defRPr>
             </a:pPr>
             <a:r>
-              <a:t>Spearman correlations also null (CMR rho=0.008, CCT rho=0.023)</a:t>
+              <a:t>Spearman correlations also null (CMR rho=0.008, CCT rho=0.020)</a:t>
             </a:r>
           </a:p>
         </p:txBody>
@@ -4374,7 +4374,7 @@
               </a:defRPr>
             </a:pPr>
             <a:r>
-              <a:t>   - CCT is unaffected (more widely distributed: 1,548 vs 725 sites)</a:t>
+              <a:t>   - CCT is unaffected (more widely distributed: 1,481 vs 687 sites)</a:t>
             </a:r>
           </a:p>
           <a:p>
@@ -4593,7 +4593,7 @@
               </a:defRPr>
             </a:pPr>
             <a:r>
-              <a:t>5. Manuscript preparation for Radiology or JACC Imaging</a:t>
+              <a:t>5. Manuscript preparation for JACC: Advances submission by June 1</a:t>
             </a:r>
           </a:p>
         </p:txBody>
